--- a/ground-vehicle/docs/courses/beginner-ps3/l4_neopixel_leds.pptx
+++ b/ground-vehicle/docs/courses/beginner-ps3/l4_neopixel_leds.pptx
@@ -1381,6 +1381,14 @@
               <a:t>The LED directly behind number 3 is the one the mirror section shows them. Let the program answer it, not you.</a:t>
             </a:r>
           </a:p>
+          <a:p>
+            <a:r>
+              <a:rPr sz="1200">
+                <a:latin typeface="Calibri"/>
+              </a:rPr>
+              <a:t>ANSWERS. Behind 3 is 28, because 31 - 3 = 28. The whole right side is two ranges, 8 to 15 on the front and 16 to 23 on the rear - the loop splits each side in two. Step 6: the middle four of the front bar are 6, 7, 8 and 9. Step 7: the four corners are 0 (front left), 15 (front right), 16 (rear right) and 31 (rear left).</a:t>
+            </a:r>
+          </a:p>
         </p:txBody>
       </p:sp>
       <p:sp>
@@ -1483,7 +1491,7 @@
               <a:rPr sz="1200">
                 <a:latin typeface="Calibri"/>
               </a:rPr>
-              <a:t>Say out loud that off-by-one is the most common bug in programming and that this is where they meet it. It normalises getting it wrong.</a:t>
+              <a:t>Say out loud that off-by-one is the most common bug in programming and that this is where they meet it. It normalizes getting it wrong.</a:t>
             </a:r>
           </a:p>
         </p:txBody>
@@ -1939,6 +1947,14 @@
               <a:t>The stoplight and the D-pad quadrants are the two easiest starting points if a group is stuck - both are for loops over a known range, which is exactly what they just practiced.</a:t>
             </a:r>
           </a:p>
+          <a:p>
+            <a:r>
+              <a:rPr sz="1200">
+                <a:latin typeface="Calibri"/>
+              </a:rPr>
+              <a:t>When a group asks how to write something, ask what their cheat sheet says before you answer. Functions, for loops, the LED map and every NeoPixel call they need are all on it.</a:t>
+            </a:r>
+          </a:p>
         </p:txBody>
       </p:sp>
       <p:sp>
@@ -2025,7 +2041,7 @@
               <a:rPr sz="1200">
                 <a:latin typeface="Calibri"/>
               </a:rPr>
-              <a:t>The last row is a good one: a dead pixel still passes data through, so everything after it keeps working. That is the chain idea again.</a:t>
+              <a:t>The last two rows are the chain idea again, from both sides. A pixel whose LED dies usually still passes the data on, so only that one is dark. A break in the data line darkens everything after it and nothing before it.</a:t>
             </a:r>
           </a:p>
         </p:txBody>
@@ -2114,7 +2130,7 @@
               <a:rPr sz="1200">
                 <a:latin typeface="Calibri"/>
               </a:rPr>
-              <a:t>Questions 6 and 7 they should answer from their own drawing, not from memory.</a:t>
+              <a:t>Questions 6 and 7 they should answer from their own drawing, not from memory. Question 6: 0 to 7 on the front and 24 to 31 on the rear. Question 7: 31 - 6 = 25.</a:t>
             </a:r>
           </a:p>
           <a:p>
@@ -2122,7 +2138,7 @@
               <a:rPr sz="1200">
                 <a:latin typeface="Calibri"/>
               </a:rPr>
-              <a:t>Question 8 should be written out. Check a few.</a:t>
+              <a:t>Question 8 should be written out. Check a few. One answer:  for (int i = 16; i &lt;= 31; i++) { strip.setPixelColor(i, strip.Color(255, 0, 0)); }  then strip.show(). Watch for &lt; 31, which misses LED 31, and for a missing show().</a:t>
             </a:r>
           </a:p>
           <a:p>
@@ -8186,7 +8202,7 @@
                 </a:solidFill>
                 <a:latin typeface="Calibri"/>
               </a:rPr>
-              <a:t>Power = voltage x current. Energy from the battery becomes light and heat, and the ratio is not as favourable as you would hope.</a:t>
+              <a:t>Power = voltage x current. Energy from the battery becomes light and heat, and the ratio is not as favorable as you would hope.</a:t>
             </a:r>
           </a:p>
         </p:txBody>
@@ -18452,7 +18468,7 @@
                 </a:solidFill>
                 <a:latin typeface="Calibri"/>
               </a:rPr>
-              <a:t>Color wipe, theatre chase, a flowing rainbow, then the scanner sweeping front and rear together.</a:t>
+              <a:t>Color wipe, theater chase, a flowing rainbow, then the scanner sweeping front and rear together.</a:t>
             </a:r>
           </a:p>
         </p:txBody>
@@ -18859,15 +18875,15 @@
               <a:spcAft>
                 <a:spcPts val="600"/>
               </a:spcAft>
-              <a:defRPr sz="2100" b="0">
-                <a:solidFill>
-                  <a:srgbClr val="222222"/>
-                </a:solidFill>
-                <a:latin typeface="Calibri"/>
-              </a:defRPr>
-            </a:pPr>
-            <a:r>
-              <a:rPr sz="2100" b="0">
+              <a:defRPr sz="1900" b="0">
+                <a:solidFill>
+                  <a:srgbClr val="222222"/>
+                </a:solidFill>
+                <a:latin typeface="Calibri"/>
+              </a:defRPr>
+            </a:pPr>
+            <a:r>
+              <a:rPr sz="1900" b="0">
                 <a:solidFill>
                   <a:srgbClr val="222222"/>
                 </a:solidFill>
@@ -18884,15 +18900,15 @@
               <a:spcAft>
                 <a:spcPts val="600"/>
               </a:spcAft>
-              <a:defRPr sz="2100" b="0">
-                <a:solidFill>
-                  <a:srgbClr val="222222"/>
-                </a:solidFill>
-                <a:latin typeface="Calibri"/>
-              </a:defRPr>
-            </a:pPr>
-            <a:r>
-              <a:rPr sz="2100" b="0">
+              <a:defRPr sz="1900" b="0">
+                <a:solidFill>
+                  <a:srgbClr val="222222"/>
+                </a:solidFill>
+                <a:latin typeface="Calibri"/>
+              </a:defRPr>
+            </a:pPr>
+            <a:r>
+              <a:rPr sz="1900" b="0">
                 <a:solidFill>
                   <a:srgbClr val="222222"/>
                 </a:solidFill>
@@ -18909,15 +18925,15 @@
               <a:spcAft>
                 <a:spcPts val="600"/>
               </a:spcAft>
-              <a:defRPr sz="2100" b="0">
-                <a:solidFill>
-                  <a:srgbClr val="222222"/>
-                </a:solidFill>
-                <a:latin typeface="Calibri"/>
-              </a:defRPr>
-            </a:pPr>
-            <a:r>
-              <a:rPr sz="2100" b="0">
+              <a:defRPr sz="1900" b="0">
+                <a:solidFill>
+                  <a:srgbClr val="222222"/>
+                </a:solidFill>
+                <a:latin typeface="Calibri"/>
+              </a:defRPr>
+            </a:pPr>
+            <a:r>
+              <a:rPr sz="1900" b="0">
                 <a:solidFill>
                   <a:srgbClr val="222222"/>
                 </a:solidFill>
@@ -18934,15 +18950,15 @@
               <a:spcAft>
                 <a:spcPts val="600"/>
               </a:spcAft>
-              <a:defRPr sz="2100" b="0">
-                <a:solidFill>
-                  <a:srgbClr val="222222"/>
-                </a:solidFill>
-                <a:latin typeface="Calibri"/>
-              </a:defRPr>
-            </a:pPr>
-            <a:r>
-              <a:rPr sz="2100" b="0">
+              <a:defRPr sz="1900" b="0">
+                <a:solidFill>
+                  <a:srgbClr val="222222"/>
+                </a:solidFill>
+                <a:latin typeface="Calibri"/>
+              </a:defRPr>
+            </a:pPr>
+            <a:r>
+              <a:rPr sz="1900" b="0">
                 <a:solidFill>
                   <a:srgbClr val="222222"/>
                 </a:solidFill>
@@ -18959,15 +18975,15 @@
               <a:spcAft>
                 <a:spcPts val="600"/>
               </a:spcAft>
-              <a:defRPr sz="2100" b="0">
-                <a:solidFill>
-                  <a:srgbClr val="222222"/>
-                </a:solidFill>
-                <a:latin typeface="Calibri"/>
-              </a:defRPr>
-            </a:pPr>
-            <a:r>
-              <a:rPr sz="2100" b="0">
+              <a:defRPr sz="1900" b="0">
+                <a:solidFill>
+                  <a:srgbClr val="222222"/>
+                </a:solidFill>
+                <a:latin typeface="Calibri"/>
+              </a:defRPr>
+            </a:pPr>
+            <a:r>
+              <a:rPr sz="1900" b="0">
                 <a:solidFill>
                   <a:srgbClr val="222222"/>
                 </a:solidFill>
@@ -18984,15 +19000,15 @@
               <a:spcAft>
                 <a:spcPts val="600"/>
               </a:spcAft>
-              <a:defRPr sz="2100" b="0">
-                <a:solidFill>
-                  <a:srgbClr val="222222"/>
-                </a:solidFill>
-                <a:latin typeface="Calibri"/>
-              </a:defRPr>
-            </a:pPr>
-            <a:r>
-              <a:rPr sz="2100" b="0">
+              <a:defRPr sz="1900" b="0">
+                <a:solidFill>
+                  <a:srgbClr val="222222"/>
+                </a:solidFill>
+                <a:latin typeface="Calibri"/>
+              </a:defRPr>
+            </a:pPr>
+            <a:r>
+              <a:rPr sz="1900" b="0">
                 <a:solidFill>
                   <a:srgbClr val="222222"/>
                 </a:solidFill>
@@ -19009,15 +19025,15 @@
               <a:spcAft>
                 <a:spcPts val="600"/>
               </a:spcAft>
-              <a:defRPr sz="2100" b="0">
-                <a:solidFill>
-                  <a:srgbClr val="222222"/>
-                </a:solidFill>
-                <a:latin typeface="Calibri"/>
-              </a:defRPr>
-            </a:pPr>
-            <a:r>
-              <a:rPr sz="2100" b="0">
+              <a:defRPr sz="1900" b="0">
+                <a:solidFill>
+                  <a:srgbClr val="222222"/>
+                </a:solidFill>
+                <a:latin typeface="Calibri"/>
+              </a:defRPr>
+            </a:pPr>
+            <a:r>
+              <a:rPr sz="1900" b="0">
                 <a:solidFill>
                   <a:srgbClr val="222222"/>
                 </a:solidFill>
@@ -19034,15 +19050,15 @@
               <a:spcAft>
                 <a:spcPts val="600"/>
               </a:spcAft>
-              <a:defRPr sz="2100" b="0">
-                <a:solidFill>
-                  <a:srgbClr val="222222"/>
-                </a:solidFill>
-                <a:latin typeface="Calibri"/>
-              </a:defRPr>
-            </a:pPr>
-            <a:r>
-              <a:rPr sz="2100" b="0">
+              <a:defRPr sz="1900" b="0">
+                <a:solidFill>
+                  <a:srgbClr val="222222"/>
+                </a:solidFill>
+                <a:latin typeface="Calibri"/>
+              </a:defRPr>
+            </a:pPr>
+            <a:r>
+              <a:rPr sz="1900" b="0">
                 <a:solidFill>
                   <a:srgbClr val="222222"/>
                 </a:solidFill>
@@ -19059,21 +19075,46 @@
               <a:spcAft>
                 <a:spcPts val="600"/>
               </a:spcAft>
-              <a:defRPr sz="2100" b="0">
-                <a:solidFill>
-                  <a:srgbClr val="222222"/>
-                </a:solidFill>
-                <a:latin typeface="Calibri"/>
-              </a:defRPr>
-            </a:pPr>
-            <a:r>
-              <a:rPr sz="2100" b="0">
+              <a:defRPr sz="1900" b="0">
+                <a:solidFill>
+                  <a:srgbClr val="222222"/>
+                </a:solidFill>
+                <a:latin typeface="Calibri"/>
+              </a:defRPr>
+            </a:pPr>
+            <a:r>
+              <a:rPr sz="1900" b="0">
                 <a:solidFill>
                   <a:srgbClr val="222222"/>
                 </a:solidFill>
                 <a:latin typeface="Calibri"/>
               </a:rPr>
               <a:t>Rules: a function you call from loop(), using at least one for loop. Then show the class - the best one gets used in the race next lesson.</a:t>
+            </a:r>
+          </a:p>
+          <a:p>
+            <a:pPr algn="l">
+              <a:lnSpc>
+                <a:spcPct val="100000"/>
+              </a:lnSpc>
+              <a:spcAft>
+                <a:spcPts val="600"/>
+              </a:spcAft>
+              <a:defRPr sz="1900" b="0">
+                <a:solidFill>
+                  <a:srgbClr val="222222"/>
+                </a:solidFill>
+                <a:latin typeface="Calibri"/>
+              </a:defRPr>
+            </a:pPr>
+            <a:r>
+              <a:rPr sz="1900" b="0">
+                <a:solidFill>
+                  <a:srgbClr val="222222"/>
+                </a:solidFill>
+                <a:latin typeface="Calibri"/>
+              </a:rPr>
+              <a:t>Stuck on how to write something? It is on your cheat sheet.</a:t>
             </a:r>
           </a:p>
         </p:txBody>
@@ -19340,7 +19381,7 @@
         </p:nvGraphicFramePr>
         <p:xfrm>
           <a:off x="502920" y="1691640"/>
-          <a:ext cx="11185854" cy="4324350"/>
+          <a:ext cx="11185854" cy="4495800"/>
         </p:xfrm>
         <a:graphic>
           <a:graphicData uri="http://schemas.openxmlformats.org/drawingml/2006/table">
@@ -19353,14 +19394,14 @@
                 <a:gridCol w="3254066"/>
                 <a:gridCol w="4474342"/>
               </a:tblGrid>
-              <a:tr h="540543">
+              <a:tr h="499533">
                 <a:tc>
                   <a:txBody>
                     <a:bodyPr/>
                     <a:lstStyle/>
                     <a:p>
                       <a:r>
-                        <a:rPr sz="1800" b="1">
+                        <a:rPr sz="1600" b="1">
                           <a:solidFill>
                             <a:srgbClr val="FFFFFF"/>
                           </a:solidFill>
@@ -19382,7 +19423,7 @@
                     <a:lstStyle/>
                     <a:p>
                       <a:r>
-                        <a:rPr sz="1800" b="1">
+                        <a:rPr sz="1600" b="1">
                           <a:solidFill>
                             <a:srgbClr val="FFFFFF"/>
                           </a:solidFill>
@@ -19404,7 +19445,7 @@
                     <a:lstStyle/>
                     <a:p>
                       <a:r>
-                        <a:rPr sz="1800" b="1">
+                        <a:rPr sz="1600" b="1">
                           <a:solidFill>
                             <a:srgbClr val="FFFFFF"/>
                           </a:solidFill>
@@ -19421,14 +19462,14 @@
                   </a:tcPr>
                 </a:tc>
               </a:tr>
-              <a:tr h="540543">
+              <a:tr h="499533">
                 <a:tc>
                   <a:txBody>
                     <a:bodyPr/>
                     <a:lstStyle/>
                     <a:p>
                       <a:r>
-                        <a:rPr sz="1800">
+                        <a:rPr sz="1600">
                           <a:solidFill>
                             <a:srgbClr val="222222"/>
                           </a:solidFill>
@@ -19450,7 +19491,7 @@
                     <a:lstStyle/>
                     <a:p>
                       <a:r>
-                        <a:rPr sz="1800">
+                        <a:rPr sz="1600">
                           <a:solidFill>
                             <a:srgbClr val="222222"/>
                           </a:solidFill>
@@ -19472,7 +19513,7 @@
                     <a:lstStyle/>
                     <a:p>
                       <a:r>
-                        <a:rPr sz="1800">
+                        <a:rPr sz="1600">
                           <a:solidFill>
                             <a:srgbClr val="222222"/>
                           </a:solidFill>
@@ -19489,14 +19530,14 @@
                   </a:tcPr>
                 </a:tc>
               </a:tr>
-              <a:tr h="540543">
+              <a:tr h="499533">
                 <a:tc>
                   <a:txBody>
                     <a:bodyPr/>
                     <a:lstStyle/>
                     <a:p>
                       <a:r>
-                        <a:rPr sz="1800">
+                        <a:rPr sz="1600">
                           <a:solidFill>
                             <a:srgbClr val="222222"/>
                           </a:solidFill>
@@ -19518,7 +19559,7 @@
                     <a:lstStyle/>
                     <a:p>
                       <a:r>
-                        <a:rPr sz="1800">
+                        <a:rPr sz="1600">
                           <a:solidFill>
                             <a:srgbClr val="222222"/>
                           </a:solidFill>
@@ -19540,7 +19581,7 @@
                     <a:lstStyle/>
                     <a:p>
                       <a:r>
-                        <a:rPr sz="1800">
+                        <a:rPr sz="1600">
                           <a:solidFill>
                             <a:srgbClr val="222222"/>
                           </a:solidFill>
@@ -19557,14 +19598,14 @@
                   </a:tcPr>
                 </a:tc>
               </a:tr>
-              <a:tr h="540543">
+              <a:tr h="499533">
                 <a:tc>
                   <a:txBody>
                     <a:bodyPr/>
                     <a:lstStyle/>
                     <a:p>
                       <a:r>
-                        <a:rPr sz="1800">
+                        <a:rPr sz="1600">
                           <a:solidFill>
                             <a:srgbClr val="222222"/>
                           </a:solidFill>
@@ -19586,7 +19627,7 @@
                     <a:lstStyle/>
                     <a:p>
                       <a:r>
-                        <a:rPr sz="1800">
+                        <a:rPr sz="1600">
                           <a:solidFill>
                             <a:srgbClr val="222222"/>
                           </a:solidFill>
@@ -19608,7 +19649,7 @@
                     <a:lstStyle/>
                     <a:p>
                       <a:r>
-                        <a:rPr sz="1800">
+                        <a:rPr sz="1600">
                           <a:solidFill>
                             <a:srgbClr val="222222"/>
                           </a:solidFill>
@@ -19625,14 +19666,14 @@
                   </a:tcPr>
                 </a:tc>
               </a:tr>
-              <a:tr h="540543">
+              <a:tr h="499533">
                 <a:tc>
                   <a:txBody>
                     <a:bodyPr/>
                     <a:lstStyle/>
                     <a:p>
                       <a:r>
-                        <a:rPr sz="1800">
+                        <a:rPr sz="1600">
                           <a:solidFill>
                             <a:srgbClr val="222222"/>
                           </a:solidFill>
@@ -19654,7 +19695,7 @@
                     <a:lstStyle/>
                     <a:p>
                       <a:r>
-                        <a:rPr sz="1800">
+                        <a:rPr sz="1600">
                           <a:solidFill>
                             <a:srgbClr val="222222"/>
                           </a:solidFill>
@@ -19676,7 +19717,7 @@
                     <a:lstStyle/>
                     <a:p>
                       <a:r>
-                        <a:rPr sz="1800">
+                        <a:rPr sz="1600">
                           <a:solidFill>
                             <a:srgbClr val="222222"/>
                           </a:solidFill>
@@ -19693,14 +19734,14 @@
                   </a:tcPr>
                 </a:tc>
               </a:tr>
-              <a:tr h="540543">
+              <a:tr h="499533">
                 <a:tc>
                   <a:txBody>
                     <a:bodyPr/>
                     <a:lstStyle/>
                     <a:p>
                       <a:r>
-                        <a:rPr sz="1800">
+                        <a:rPr sz="1600">
                           <a:solidFill>
                             <a:srgbClr val="222222"/>
                           </a:solidFill>
@@ -19722,7 +19763,7 @@
                     <a:lstStyle/>
                     <a:p>
                       <a:r>
-                        <a:rPr sz="1800">
+                        <a:rPr sz="1600">
                           <a:solidFill>
                             <a:srgbClr val="222222"/>
                           </a:solidFill>
@@ -19744,7 +19785,7 @@
                     <a:lstStyle/>
                     <a:p>
                       <a:r>
-                        <a:rPr sz="1800">
+                        <a:rPr sz="1600">
                           <a:solidFill>
                             <a:srgbClr val="222222"/>
                           </a:solidFill>
@@ -19761,14 +19802,14 @@
                   </a:tcPr>
                 </a:tc>
               </a:tr>
-              <a:tr h="540543">
+              <a:tr h="499533">
                 <a:tc>
                   <a:txBody>
                     <a:bodyPr/>
                     <a:lstStyle/>
                     <a:p>
                       <a:r>
-                        <a:rPr sz="1800">
+                        <a:rPr sz="1600">
                           <a:solidFill>
                             <a:srgbClr val="222222"/>
                           </a:solidFill>
@@ -19790,7 +19831,7 @@
                     <a:lstStyle/>
                     <a:p>
                       <a:r>
-                        <a:rPr sz="1800">
+                        <a:rPr sz="1600">
                           <a:solidFill>
                             <a:srgbClr val="222222"/>
                           </a:solidFill>
@@ -19812,7 +19853,7 @@
                     <a:lstStyle/>
                     <a:p>
                       <a:r>
-                        <a:rPr sz="1800">
+                        <a:rPr sz="1600">
                           <a:solidFill>
                             <a:srgbClr val="222222"/>
                           </a:solidFill>
@@ -19829,20 +19870,20 @@
                   </a:tcPr>
                 </a:tc>
               </a:tr>
-              <a:tr h="540549">
+              <a:tr h="499533">
                 <a:tc>
                   <a:txBody>
                     <a:bodyPr/>
                     <a:lstStyle/>
                     <a:p>
                       <a:r>
-                        <a:rPr sz="1800">
+                        <a:rPr sz="1600">
                           <a:solidFill>
                             <a:srgbClr val="222222"/>
                           </a:solidFill>
                           <a:latin typeface="Calibri"/>
                         </a:rPr>
-                        <a:t>One LED stays dark forever</a:t>
+                        <a:t>One LED stays dark, the rest work</a:t>
                       </a:r>
                     </a:p>
                   </a:txBody>
@@ -19858,13 +19899,13 @@
                     <a:lstStyle/>
                     <a:p>
                       <a:r>
-                        <a:rPr sz="1800">
+                        <a:rPr sz="1600">
                           <a:solidFill>
                             <a:srgbClr val="222222"/>
                           </a:solidFill>
                           <a:latin typeface="Calibri"/>
                         </a:rPr>
-                        <a:t>That pixel or its solder joint has failed</a:t>
+                        <a:t>That pixel's LED has failed</a:t>
                       </a:r>
                     </a:p>
                   </a:txBody>
@@ -19880,19 +19921,87 @@
                     <a:lstStyle/>
                     <a:p>
                       <a:r>
-                        <a:rPr sz="1800">
+                        <a:rPr sz="1600">
                           <a:solidFill>
                             <a:srgbClr val="222222"/>
                           </a:solidFill>
                           <a:latin typeface="Calibri"/>
                         </a:rPr>
-                        <a:t>Everything after it still works - it passes data through</a:t>
+                        <a:t>Its chip still passes the data on - replace it when you can</a:t>
                       </a:r>
                     </a:p>
                   </a:txBody>
                   <a:tcPr marL="73152" marT="18288" marB="18288">
                     <a:solidFill>
                       <a:srgbClr val="FFFFFF"/>
+                    </a:solidFill>
+                  </a:tcPr>
+                </a:tc>
+              </a:tr>
+              <a:tr h="499536">
+                <a:tc>
+                  <a:txBody>
+                    <a:bodyPr/>
+                    <a:lstStyle/>
+                    <a:p>
+                      <a:r>
+                        <a:rPr sz="1600">
+                          <a:solidFill>
+                            <a:srgbClr val="222222"/>
+                          </a:solidFill>
+                          <a:latin typeface="Calibri"/>
+                        </a:rPr>
+                        <a:t>Every LED after one point is dark</a:t>
+                      </a:r>
+                    </a:p>
+                  </a:txBody>
+                  <a:tcPr marL="73152" marT="18288" marB="18288">
+                    <a:solidFill>
+                      <a:srgbClr val="EEF3F8"/>
+                    </a:solidFill>
+                  </a:tcPr>
+                </a:tc>
+                <a:tc>
+                  <a:txBody>
+                    <a:bodyPr/>
+                    <a:lstStyle/>
+                    <a:p>
+                      <a:r>
+                        <a:rPr sz="1600">
+                          <a:solidFill>
+                            <a:srgbClr val="222222"/>
+                          </a:solidFill>
+                          <a:latin typeface="Calibri"/>
+                        </a:rPr>
+                        <a:t>The data chain is broken at that pixel</a:t>
+                      </a:r>
+                    </a:p>
+                  </a:txBody>
+                  <a:tcPr marL="73152" marT="18288" marB="18288">
+                    <a:solidFill>
+                      <a:srgbClr val="EEF3F8"/>
+                    </a:solidFill>
+                  </a:tcPr>
+                </a:tc>
+                <a:tc>
+                  <a:txBody>
+                    <a:bodyPr/>
+                    <a:lstStyle/>
+                    <a:p>
+                      <a:r>
+                        <a:rPr sz="1600">
+                          <a:solidFill>
+                            <a:srgbClr val="222222"/>
+                          </a:solidFill>
+                          <a:latin typeface="Calibri"/>
+                        </a:rPr>
+                        <a:t>Check its DATA IN and DATA OUT joints</a:t>
+                      </a:r>
+                    </a:p>
+                  </a:txBody>
+                  <a:tcPr marL="73152" marT="18288" marB="18288">
+                    <a:solidFill>
+                      <a:srgbClr val="EEF3F8"/>
                     </a:solidFill>
                   </a:tcPr>
                 </a:tc>
